--- a/figure/method.pptx
+++ b/figure/method.pptx
@@ -259,7 +259,7 @@
           <a:p>
             <a:fld id="{5626DEA0-22E4-4D52-B01E-C7A2D2E07EB5}" type="datetimeFigureOut">
               <a:rPr kumimoji="1" lang="ja-JP" altLang="en-US" smtClean="0"/>
-              <a:t>2026/1/15</a:t>
+              <a:t>2026/1/27</a:t>
             </a:fld>
             <a:endParaRPr kumimoji="1" lang="ja-JP" altLang="en-US"/>
           </a:p>
@@ -489,7 +489,7 @@
           <a:p>
             <a:fld id="{5626DEA0-22E4-4D52-B01E-C7A2D2E07EB5}" type="datetimeFigureOut">
               <a:rPr kumimoji="1" lang="ja-JP" altLang="en-US" smtClean="0"/>
-              <a:t>2026/1/15</a:t>
+              <a:t>2026/1/27</a:t>
             </a:fld>
             <a:endParaRPr kumimoji="1" lang="ja-JP" altLang="en-US"/>
           </a:p>
@@ -729,7 +729,7 @@
           <a:p>
             <a:fld id="{5626DEA0-22E4-4D52-B01E-C7A2D2E07EB5}" type="datetimeFigureOut">
               <a:rPr kumimoji="1" lang="ja-JP" altLang="en-US" smtClean="0"/>
-              <a:t>2026/1/15</a:t>
+              <a:t>2026/1/27</a:t>
             </a:fld>
             <a:endParaRPr kumimoji="1" lang="ja-JP" altLang="en-US"/>
           </a:p>
@@ -959,7 +959,7 @@
           <a:p>
             <a:fld id="{5626DEA0-22E4-4D52-B01E-C7A2D2E07EB5}" type="datetimeFigureOut">
               <a:rPr kumimoji="1" lang="ja-JP" altLang="en-US" smtClean="0"/>
-              <a:t>2026/1/15</a:t>
+              <a:t>2026/1/27</a:t>
             </a:fld>
             <a:endParaRPr kumimoji="1" lang="ja-JP" altLang="en-US"/>
           </a:p>
@@ -1234,7 +1234,7 @@
           <a:p>
             <a:fld id="{5626DEA0-22E4-4D52-B01E-C7A2D2E07EB5}" type="datetimeFigureOut">
               <a:rPr kumimoji="1" lang="ja-JP" altLang="en-US" smtClean="0"/>
-              <a:t>2026/1/15</a:t>
+              <a:t>2026/1/27</a:t>
             </a:fld>
             <a:endParaRPr kumimoji="1" lang="ja-JP" altLang="en-US"/>
           </a:p>
@@ -1563,7 +1563,7 @@
           <a:p>
             <a:fld id="{5626DEA0-22E4-4D52-B01E-C7A2D2E07EB5}" type="datetimeFigureOut">
               <a:rPr kumimoji="1" lang="ja-JP" altLang="en-US" smtClean="0"/>
-              <a:t>2026/1/15</a:t>
+              <a:t>2026/1/27</a:t>
             </a:fld>
             <a:endParaRPr kumimoji="1" lang="ja-JP" altLang="en-US"/>
           </a:p>
@@ -2039,7 +2039,7 @@
           <a:p>
             <a:fld id="{5626DEA0-22E4-4D52-B01E-C7A2D2E07EB5}" type="datetimeFigureOut">
               <a:rPr kumimoji="1" lang="ja-JP" altLang="en-US" smtClean="0"/>
-              <a:t>2026/1/15</a:t>
+              <a:t>2026/1/27</a:t>
             </a:fld>
             <a:endParaRPr kumimoji="1" lang="ja-JP" altLang="en-US"/>
           </a:p>
@@ -2180,7 +2180,7 @@
           <a:p>
             <a:fld id="{5626DEA0-22E4-4D52-B01E-C7A2D2E07EB5}" type="datetimeFigureOut">
               <a:rPr kumimoji="1" lang="ja-JP" altLang="en-US" smtClean="0"/>
-              <a:t>2026/1/15</a:t>
+              <a:t>2026/1/27</a:t>
             </a:fld>
             <a:endParaRPr kumimoji="1" lang="ja-JP" altLang="en-US"/>
           </a:p>
@@ -2293,7 +2293,7 @@
           <a:p>
             <a:fld id="{5626DEA0-22E4-4D52-B01E-C7A2D2E07EB5}" type="datetimeFigureOut">
               <a:rPr kumimoji="1" lang="ja-JP" altLang="en-US" smtClean="0"/>
-              <a:t>2026/1/15</a:t>
+              <a:t>2026/1/27</a:t>
             </a:fld>
             <a:endParaRPr kumimoji="1" lang="ja-JP" altLang="en-US"/>
           </a:p>
@@ -2636,7 +2636,7 @@
           <a:p>
             <a:fld id="{5626DEA0-22E4-4D52-B01E-C7A2D2E07EB5}" type="datetimeFigureOut">
               <a:rPr kumimoji="1" lang="ja-JP" altLang="en-US" smtClean="0"/>
-              <a:t>2026/1/15</a:t>
+              <a:t>2026/1/27</a:t>
             </a:fld>
             <a:endParaRPr kumimoji="1" lang="ja-JP" altLang="en-US"/>
           </a:p>
@@ -2924,7 +2924,7 @@
           <a:p>
             <a:fld id="{5626DEA0-22E4-4D52-B01E-C7A2D2E07EB5}" type="datetimeFigureOut">
               <a:rPr kumimoji="1" lang="ja-JP" altLang="en-US" smtClean="0"/>
-              <a:t>2026/1/15</a:t>
+              <a:t>2026/1/27</a:t>
             </a:fld>
             <a:endParaRPr kumimoji="1" lang="ja-JP" altLang="en-US"/>
           </a:p>
@@ -3197,7 +3197,7 @@
           <a:p>
             <a:fld id="{5626DEA0-22E4-4D52-B01E-C7A2D2E07EB5}" type="datetimeFigureOut">
               <a:rPr kumimoji="1" lang="ja-JP" altLang="en-US" smtClean="0"/>
-              <a:t>2026/1/15</a:t>
+              <a:t>2026/1/27</a:t>
             </a:fld>
             <a:endParaRPr kumimoji="1" lang="ja-JP" altLang="en-US"/>
           </a:p>
@@ -4936,70 +4936,6 @@
           </p:txBody>
         </p:sp>
       </p:grpSp>
-      <p:sp>
-        <p:nvSpPr>
-          <p:cNvPr id="47" name="テキスト ボックス 46">
-            <a:extLst>
-              <a:ext uri="{FF2B5EF4-FFF2-40B4-BE49-F238E27FC236}">
-                <a16:creationId xmlns:a16="http://schemas.microsoft.com/office/drawing/2014/main" id="{7D339DCD-4A6F-65D0-4820-3A79AF173751}"/>
-              </a:ext>
-            </a:extLst>
-          </p:cNvPr>
-          <p:cNvSpPr txBox="1"/>
-          <p:nvPr/>
-        </p:nvSpPr>
-        <p:spPr>
-          <a:xfrm>
-            <a:off x="9302085" y="4440650"/>
-            <a:ext cx="2204230" cy="461665"/>
-          </a:xfrm>
-          <a:prstGeom prst="rect">
-            <a:avLst/>
-          </a:prstGeom>
-          <a:noFill/>
-        </p:spPr>
-        <p:txBody>
-          <a:bodyPr wrap="square" rtlCol="0">
-            <a:spAutoFit/>
-          </a:bodyPr>
-          <a:lstStyle/>
-          <a:p>
-            <a:pPr lvl="0" eaLnBrk="0" fontAlgn="base" hangingPunct="0">
-              <a:spcBef>
-                <a:spcPct val="0"/>
-              </a:spcBef>
-              <a:spcAft>
-                <a:spcPct val="0"/>
-              </a:spcAft>
-            </a:pPr>
-            <a:r>
-              <a:rPr kumimoji="0" lang="en-US" altLang="ja-JP" sz="2400" i="0" u="none" strike="noStrike" cap="none" normalizeH="0" baseline="0" dirty="0">
-                <a:ln>
-                  <a:noFill/>
-                </a:ln>
-                <a:solidFill>
-                  <a:schemeClr val="tx1"/>
-                </a:solidFill>
-                <a:effectLst/>
-                <a:latin typeface="Arial" panose="020B0604020202020204" pitchFamily="34" charset="0"/>
-                <a:cs typeface="Arial" panose="020B0604020202020204" pitchFamily="34" charset="0"/>
-              </a:rPr>
-              <a:t>Aggregation</a:t>
-            </a:r>
-            <a:endParaRPr kumimoji="0" lang="ja-JP" altLang="ja-JP" sz="2400" i="0" u="none" strike="noStrike" cap="none" normalizeH="0" baseline="0" dirty="0">
-              <a:ln>
-                <a:noFill/>
-              </a:ln>
-              <a:solidFill>
-                <a:schemeClr val="tx1"/>
-              </a:solidFill>
-              <a:effectLst/>
-              <a:latin typeface="Arial" panose="020B0604020202020204" pitchFamily="34" charset="0"/>
-              <a:cs typeface="Arial" panose="020B0604020202020204" pitchFamily="34" charset="0"/>
-            </a:endParaRPr>
-          </a:p>
-        </p:txBody>
-      </p:sp>
       <mc:AlternateContent xmlns:mc="http://schemas.openxmlformats.org/markup-compatibility/2006" xmlns:a14="http://schemas.microsoft.com/office/drawing/2010/main">
         <mc:Choice Requires="a14">
           <p:sp>
@@ -7015,70 +6951,6 @@
           </a:p>
         </p:txBody>
       </p:sp>
-      <p:sp>
-        <p:nvSpPr>
-          <p:cNvPr id="58" name="テキスト ボックス 57">
-            <a:extLst>
-              <a:ext uri="{FF2B5EF4-FFF2-40B4-BE49-F238E27FC236}">
-                <a16:creationId xmlns:a16="http://schemas.microsoft.com/office/drawing/2014/main" id="{6D4C93C0-DDC2-4D46-9FD4-F456C72A302B}"/>
-              </a:ext>
-            </a:extLst>
-          </p:cNvPr>
-          <p:cNvSpPr txBox="1"/>
-          <p:nvPr/>
-        </p:nvSpPr>
-        <p:spPr>
-          <a:xfrm>
-            <a:off x="9315305" y="3551851"/>
-            <a:ext cx="2074346" cy="461665"/>
-          </a:xfrm>
-          <a:prstGeom prst="rect">
-            <a:avLst/>
-          </a:prstGeom>
-          <a:noFill/>
-        </p:spPr>
-        <p:txBody>
-          <a:bodyPr wrap="square" rtlCol="0">
-            <a:spAutoFit/>
-          </a:bodyPr>
-          <a:lstStyle/>
-          <a:p>
-            <a:pPr lvl="0" eaLnBrk="0" fontAlgn="base" hangingPunct="0">
-              <a:spcBef>
-                <a:spcPct val="0"/>
-              </a:spcBef>
-              <a:spcAft>
-                <a:spcPct val="0"/>
-              </a:spcAft>
-            </a:pPr>
-            <a:r>
-              <a:rPr kumimoji="0" lang="en-US" altLang="ja-JP" sz="2400" i="0" u="none" strike="noStrike" cap="none" normalizeH="0" baseline="0" dirty="0">
-                <a:ln>
-                  <a:noFill/>
-                </a:ln>
-                <a:solidFill>
-                  <a:schemeClr val="tx1"/>
-                </a:solidFill>
-                <a:effectLst/>
-                <a:latin typeface="Arial" panose="020B0604020202020204" pitchFamily="34" charset="0"/>
-                <a:cs typeface="Arial" panose="020B0604020202020204" pitchFamily="34" charset="0"/>
-              </a:rPr>
-              <a:t>Normalization</a:t>
-            </a:r>
-            <a:endParaRPr kumimoji="0" lang="ja-JP" altLang="ja-JP" sz="2400" i="0" u="none" strike="noStrike" cap="none" normalizeH="0" baseline="0" dirty="0">
-              <a:ln>
-                <a:noFill/>
-              </a:ln>
-              <a:solidFill>
-                <a:schemeClr val="tx1"/>
-              </a:solidFill>
-              <a:effectLst/>
-              <a:latin typeface="Arial" panose="020B0604020202020204" pitchFamily="34" charset="0"/>
-              <a:cs typeface="Arial" panose="020B0604020202020204" pitchFamily="34" charset="0"/>
-            </a:endParaRPr>
-          </a:p>
-        </p:txBody>
-      </p:sp>
       <mc:AlternateContent xmlns:mc="http://schemas.openxmlformats.org/markup-compatibility/2006" xmlns:a14="http://schemas.microsoft.com/office/drawing/2010/main">
         <mc:Choice Requires="a14">
           <p:sp>
